--- a/documentos/Banner/Banner_FECAP_5NACCOMP_CANNOLYZE.pptx
+++ b/documentos/Banner/Banner_FECAP_5NACCOMP_CANNOLYZE.pptx
@@ -10976,8 +10976,8 @@
         </p:blipFill>
         <p:spPr bwMode="auto">
           <a:xfrm>
-            <a:off x="10728281" y="12557081"/>
-            <a:ext cx="1990769" cy="1990769"/>
+            <a:off x="10814050" y="13404850"/>
+            <a:ext cx="1600200" cy="1600200"/>
           </a:xfrm>
           <a:prstGeom prst="rect">
             <a:avLst/>
@@ -11056,8 +11056,8 @@
         </p:blipFill>
         <p:spPr bwMode="auto">
           <a:xfrm>
-            <a:off x="3270251" y="12775102"/>
-            <a:ext cx="4571999" cy="1772748"/>
+            <a:off x="3575050" y="13540197"/>
+            <a:ext cx="3581400" cy="1388653"/>
           </a:xfrm>
           <a:prstGeom prst="rect">
             <a:avLst/>
@@ -11083,7 +11083,7 @@
           <p:nvPr/>
         </p:nvPicPr>
         <p:blipFill>
-          <a:blip r:embed="rId6">
+          <a:blip r:embed="rId6" cstate="print">
             <a:extLst>
               <a:ext uri="{28A0092B-C50C-407E-A947-70E740481C1C}">
                 <a14:useLocalDpi xmlns:a14="http://schemas.microsoft.com/office/drawing/2010/main" val="0"/>
@@ -11097,8 +11097,8 @@
         </p:blipFill>
         <p:spPr bwMode="auto">
           <a:xfrm>
-            <a:off x="8039696" y="12393887"/>
-            <a:ext cx="2317154" cy="2317155"/>
+            <a:off x="8060059" y="13317858"/>
+            <a:ext cx="1763391" cy="1763392"/>
           </a:xfrm>
           <a:prstGeom prst="rect">
             <a:avLst/>
@@ -11113,6 +11113,84 @@
               </a14:hiddenFill>
             </a:ext>
           </a:extLst>
+        </p:spPr>
+      </p:pic>
+      <p:pic>
+        <p:nvPicPr>
+          <p:cNvPr id="15" name="Imagem 14"/>
+          <p:cNvPicPr>
+            <a:picLocks noChangeAspect="1"/>
+          </p:cNvPicPr>
+          <p:nvPr/>
+        </p:nvPicPr>
+        <p:blipFill>
+          <a:blip r:embed="rId7"/>
+          <a:stretch>
+            <a:fillRect/>
+          </a:stretch>
+        </p:blipFill>
+        <p:spPr>
+          <a:xfrm>
+            <a:off x="1067927" y="8756097"/>
+            <a:ext cx="11193923" cy="3962953"/>
+          </a:xfrm>
+          <a:prstGeom prst="rect">
+            <a:avLst/>
+          </a:prstGeom>
+        </p:spPr>
+      </p:pic>
+      <p:pic>
+        <p:nvPicPr>
+          <p:cNvPr id="16" name="Imagem 15"/>
+          <p:cNvPicPr>
+            <a:picLocks noChangeAspect="1"/>
+          </p:cNvPicPr>
+          <p:nvPr/>
+        </p:nvPicPr>
+        <p:blipFill>
+          <a:blip r:embed="rId8"/>
+          <a:stretch>
+            <a:fillRect/>
+          </a:stretch>
+        </p:blipFill>
+        <p:spPr>
+          <a:xfrm>
+            <a:off x="1067927" y="5750787"/>
+            <a:ext cx="11193923" cy="2581635"/>
+          </a:xfrm>
+          <a:prstGeom prst="rect">
+            <a:avLst/>
+          </a:prstGeom>
+        </p:spPr>
+      </p:pic>
+      <p:pic>
+        <p:nvPicPr>
+          <p:cNvPr id="18" name="Imagem 17"/>
+          <p:cNvPicPr>
+            <a:picLocks noChangeAspect="1"/>
+          </p:cNvPicPr>
+          <p:nvPr/>
+        </p:nvPicPr>
+        <p:blipFill>
+          <a:blip r:embed="rId9">
+            <a:extLst>
+              <a:ext uri="{28A0092B-C50C-407E-A947-70E740481C1C}">
+                <a14:useLocalDpi xmlns:a14="http://schemas.microsoft.com/office/drawing/2010/main" val="0"/>
+              </a:ext>
+            </a:extLst>
+          </a:blip>
+          <a:stretch>
+            <a:fillRect/>
+          </a:stretch>
+        </p:blipFill>
+        <p:spPr>
+          <a:xfrm>
+            <a:off x="685471" y="13117776"/>
+            <a:ext cx="2076450" cy="2076450"/>
+          </a:xfrm>
+          <a:prstGeom prst="rect">
+            <a:avLst/>
+          </a:prstGeom>
         </p:spPr>
       </p:pic>
     </p:spTree>
